--- a/opencode-v2/docs/presentation-flux.pptx
+++ b/opencode-v2/docs/presentation-flux.pptx
@@ -123,7 +123,7 @@
   <p:extLst>
     <p:ext uri="{521415D9-36F7-43E2-AB2F-B90AF26B5E84}">
       <p14:sectionLst xmlns:p14="http://schemas.microsoft.com/office/powerpoint/2010/main">
-        <p14:section name="Le principe" id="{2aedf590-f729-5bd7-7b58-b5695d2dc539}">
+        <p14:section name="Le principe" id="{eab4d58c-2835-4128-7aee-6eb84aca7c38}">
           <p14:sldIdLst>
             <p14:sldId id="256"/>
             <p14:sldId id="257"/>
@@ -131,14 +131,14 @@
             <p14:sldId id="259"/>
           </p14:sldIdLst>
         </p14:section>
-        <p14:section name="/fortify" id="{18b3de7d-897a-059b-063c-77b62588b584}">
+        <p14:section name="/fortify" id="{ca9d21e0-2862-2979-89e5-323f9df02076}">
           <p14:sldIdLst>
             <p14:sldId id="260"/>
             <p14:sldId id="261"/>
             <p14:sldId id="262"/>
           </p14:sldIdLst>
         </p14:section>
-        <p14:section name="/go" id="{ddd6c4d3-b7c2-8905-ef51-28ceef2d36f0}">
+        <p14:section name="/go" id="{f89b272f-e69a-a241-148e-32470c067e24}">
           <p14:sldIdLst>
             <p14:sldId id="263"/>
             <p14:sldId id="264"/>
@@ -146,24 +146,24 @@
             <p14:sldId id="266"/>
           </p14:sldIdLst>
         </p14:section>
-        <p14:section name="Sans ticket" id="{ffa86666-7459-00f4-196b-4887adea3faf}">
+        <p14:section name="Sans ticket" id="{b7c7eeb2-48f7-3051-1dd7-afb137ecfdf7}">
           <p14:sldIdLst>
             <p14:sldId id="267"/>
           </p14:sldIdLst>
         </p14:section>
-        <p14:section name="Après la MR" id="{32a47a84-e9ed-040c-8b9f-366c49a2cd35}">
+        <p14:section name="Après la MR" id="{4721eef3-3122-8fe0-a2b6-3a7f35039fe7}">
           <p14:sldIdLst>
             <p14:sldId id="268"/>
             <p14:sldId id="269"/>
           </p14:sldIdLst>
         </p14:section>
-        <p14:section name="Quand ça coince" id="{55b181ac-294f-6087-466f-da5934ef02eb}">
+        <p14:section name="Quand ça coince" id="{dec738a9-2bd2-50ac-d07d-65395426cf33}">
           <p14:sldIdLst>
             <p14:sldId id="270"/>
             <p14:sldId id="271"/>
           </p14:sldIdLst>
         </p14:section>
-        <p14:section name="Conclusion" id="{e5c5dc95-1272-2c6c-b40e-fe339ddf1a21}">
+        <p14:section name="Conclusion" id="{64a36f63-d36e-0acb-41eb-c9fd76f70578}">
           <p14:sldIdLst>
             <p14:sldId id="272"/>
           </p14:sldIdLst>
@@ -1188,7 +1188,7 @@
           <a:p>
             <a:r>
               <a:rPr lang="en-US" dirty="0"/>
-              <a:t>Qui valide ? Le développeur, toujours : les agents ouvrent une MR en Draft, ne mergent jamais et ne poussent jamais sur develop, main ou master. Et si un correctif casse autre chose ? Les tests de non-régression sont posés avant de toucher au code, tous les tests tournent avant le push, la relecture du checker vérifie les critères du ticket, et un test rouge n'est jamais relancé jusqu'à passer. L'IA voit-elle nos secrets ? Non : nuget.config, fichiers .env, identifiants git, ~/.zshenv sont refusés à tous les agents, comme toute commande qui afficherait l'environnement ; pas de recherche ni de page web ; Jira, Confluence et Fortify en lecture seule. Et si l'IA tourne en rond ? Une réponse qui se répète est coupée, un même appel répété trois fois est refusé, chaque agent a un nombre d'étapes borné ; au-delà, l'arrêt dit pourquoi. Le poste est-il bloqué ? Rien n'attend sans limite ; pendant un run, le développeur travaille ailleurs, par exemple dans un autre espace de travail. Et si ça s'arrête au milieu ? Tout est gardé : la fiche du ticket, les commits, le travail mis de côté ; relancer la commande reprend à la première étape non faite. Et les skills trouvés sur Internet ? OpenCode charge d'office les skills de ~/.claude/skills, de ~/.agents/skills et des dossiers .claude, .agents et .opencode du projet et de ses dossiers parents : ils sont retirés. Seuls nos skills, relus et versionnés dans le dépôt de notre configuration, et les patterns de l'équipe sont chargés ; un skill utile, même publié par Microsoft, est d'abord relu et réécrit chez nous. Et une longue session ? Quand une requête approche de la taille que le modèle accepte, les plus anciennes sorties d'outils (un fichier lu, un build) sont effacées des requêtes, jamais les rapports des agents ; le modèle relit un fichier s'il en a besoin, et le résumé du contexte, plus long et qui garde moins, arrive plus tard ou jamais.</a:t>
+              <a:t>Qui valide ? Le développeur, toujours : les agents ouvrent une MR en Draft, ne mergent jamais et ne poussent jamais sur develop, main ou master. Et si un correctif casse autre chose ? Les tests de non-régression sont posés avant de toucher au code, tous les tests tournent avant le push, la relecture du checker vérifie les critères du ticket, et un test rouge n'est jamais relancé jusqu'à passer. L'IA voit-elle nos secrets ? Non : nuget.config, fichiers .env, identifiants git, ~/.zshenv sont refusés à tous les agents, comme toute commande qui afficherait l'environnement ; pas de recherche ni de page web ; Jira, Confluence et Fortify en lecture seule. Et si l'IA tourne en rond ? Une réponse qui se répète est coupée, un même appel répété trois fois est refusé, chaque agent a un nombre d'étapes borné ; au-delà, l'arrêt dit pourquoi. Le poste est-il bloqué ? Rien n'attend sans limite ; pendant un run, le développeur travaille ailleurs, par exemple dans un autre espace de travail. Et si ça s'arrête au milieu ? Tout est gardé : la fiche du ticket, les commits, le travail mis de côté ; relancer la commande reprend à la première étape non faite. Et les skills trouvés sur Internet ? OpenCode charge d'office les skills de ~/.claude/skills, de ~/.agents/skills et des dossiers .claude, .agents et .opencode du projet et de ses dossiers parents : ils sont retirés. Seuls nos skills, relus et versionnés dans le dépôt de notre configuration, et les patterns de l'équipe sont chargés ; un skill utile, même publié par Microsoft, est d'abord relu et réécrit chez nous. Et si l'IA comprend mal le ticket ? Avant la première ligne de code, le plan est relu par le checker, qui n'a pas vu l'analyse : il lit la fiche, le ticket et le code, et cherche une exigence oubliée, un fichier qui n'existe pas, une étape dans le mauvais ordre ; l'analyst corrige, ou prouve qu'il a raison, et la MR montre ce qui a été écarté. Le développeur peut aussi demander l'analyse seule et relire le plan avant que le code commence. Et une longue session ? Quand une requête approche de la taille que le modèle accepte, les plus anciennes sorties d'outils (un fichier lu, un build) sont effacées des requêtes, jamais les rapports des agents ; le modèle relit un fichier s'il en a besoin, et le résumé du contexte, plus long et qui garde moins, arrive plus tard ou jamais.</a:t>
             </a:r>
             <a:endParaRPr lang="en-US" dirty="0"/>
           </a:p>
@@ -1892,7 +1892,7 @@
           <a:p>
             <a:r>
               <a:rPr lang="en-US" dirty="0"/>
-              <a:t>Trois temps. Préparer : la branche, l'analyse du ticket en une fiche, et en parallèle le build et les tests de develop : develop doit compiler, et ses tests déjà rouges sont notés pour ne jamais être mis sur le dos du ticket. Coder : une étape à la fois, chacune prouvée avant son commit. Livrer : tous les tests et la relecture en même temps, les corrections, le contrôle avant push, la MR en Draft. En dessous, ce qui arrête le run à chaque temps, avec sa raison dans la fiche : la commande reprend là où elle s'est arrêtée.</a:t>
+              <a:t>Trois temps. Préparer : la branche, l'analyse du ticket en une fiche, et en parallèle le build et les tests de develop : develop doit compiler, et ses tests déjà rouges sont notés pour ne jamais être mis sur le dos du ticket ; puis le plan est relu par le checker, qui n'a pas vu l'analyse, avant la première ligne de code. Coder : une étape à la fois, chacune prouvée avant son commit. Livrer : tous les tests et la relecture en même temps, les corrections, le contrôle avant push, la MR en Draft. En dessous, ce qui arrête le run à chaque temps, avec sa raison dans la fiche : la commande reprend là où elle s'est arrêtée.</a:t>
             </a:r>
             <a:endParaRPr lang="en-US" dirty="0"/>
           </a:p>
@@ -1980,7 +1980,7 @@
           <a:p>
             <a:r>
               <a:rPr lang="en-US" dirty="0"/>
-              <a:t>Le pilote lit l'état git (un fetch) et crée la branche du ticket. Ensuite, deux choses en même temps : l'analyst lit le ticket Jira, ses pages Confluence et le code, et écrit la fiche (critères d'acceptation, plan de 2 à 7 étapes, tests attendus, décisions) ; pendant ce temps, develop est buildé et testé. Si develop ne compile pas, si ses tests ne tiennent pas dans le temps d'une commande sur ce poste, ou si le poste n'a pas le bon SDK ou n'atteint pas Artifactory, on s'arrête ici, avec ce qu'il faut régler : ce n'est pas au ticket de le corriger. Les questions bloquantes arrivent toutes ensemble dans un QCM ; avec la consigne « sans question », les agents prennent les réponses recommandées et les notent « à valider en review ». Ce qui repart tout seul : un fetch coupé (après 3 s puis 10 s), un appel Jira en erreur serveur (un rappel après 20 s).</a:t>
+              <a:t>Le pilote lit l'état git (un fetch) et crée la branche du ticket. Ensuite, deux choses en même temps : l'analyst lit le ticket Jira, ses pages Confluence et le code, et écrit la fiche (critères d'acceptation, plan de 2 à 7 étapes, tests attendus, décisions) ; pendant ce temps, develop est buildé et testé. Si develop ne compile pas, si ses tests ne tiennent pas dans le temps d'une commande sur ce poste, ou si le poste n'a pas le bon SDK ou n'atteint pas Artifactory, on s'arrête ici, avec ce qu'il faut régler : ce n'est pas au ticket de le corriger. Puis le plan est relu avant la moindre ligne de code. D'abord par un script : chaque fichier que le plan cite existe dans le dépôt, ou l'étape le crée. Puis par le checker, qui n'a pas vu l'analyse : il lit seulement la fiche, le ticket et le code, comme le coder les lira, et cherche ce qui ferait échouer le ticket : une exigence oubliée, un fichier ou une méthode qui n'existe pas, une étape qui s'appuie sur une suivante, une migration ou un filet de non-régression oublié. L'analyst corrige chaque point, ou l'écarte avec une preuve (un fichier et sa ligne, une phrase du ticket) : l'écart devient une décision de la MR. Un seul tour, le code et les tests prennent le relais. Les questions bloquantes arrivent ensuite toutes ensemble dans un QCM ; avec la consigne « sans question », les agents prennent les réponses recommandées et les notent « à valider en review ». Ce qui repart tout seul : un fetch coupé (après 3 s puis 10 s), un appel Jira en erreur serveur (un rappel après 20 s).</a:t>
             </a:r>
             <a:endParaRPr lang="en-US" dirty="0"/>
           </a:p>
@@ -13189,7 +13189,7 @@
                 <a:ea typeface="Calibri" pitchFamily="34" charset="-122"/>
                 <a:cs typeface="Calibri" pitchFamily="34" charset="-120"/>
               </a:rPr>
-              <a:t>Et une longue session ?</a:t>
+              <a:t>Et si l'IA comprend mal le ticket ?</a:t>
             </a:r>
             <a:endParaRPr lang="en-US" sz="1700" dirty="0"/>
           </a:p>
@@ -13228,7 +13228,7 @@
                 <a:ea typeface="Calibri" pitchFamily="34" charset="-122"/>
                 <a:cs typeface="Calibri" pitchFamily="34" charset="-120"/>
               </a:rPr>
-              <a:t>Les vieilles sorties d'outils sont allégées avant que le contexte sature.</a:t>
+              <a:t>Le plan est relu par un agent qui n'a pas vu l'analyse, avant le code.</a:t>
             </a:r>
             <a:endParaRPr lang="en-US" sz="1400" dirty="0"/>
           </a:p>
@@ -23703,11 +23703,11 @@
             </a:avLst>
           </a:prstGeom>
           <a:solidFill>
-            <a:srgbClr val="F4F5F7"/>
-          </a:solidFill>
-          <a:ln w="15875">
-            <a:solidFill>
-              <a:srgbClr val="7A828C"/>
+            <a:srgbClr val="E4EEF8"/>
+          </a:solidFill>
+          <a:ln w="15875">
+            <a:solidFill>
+              <a:srgbClr val="2E6DA4"/>
             </a:solidFill>
           </a:ln>
         </p:spPr>
@@ -23727,7 +23727,7 @@
                 <a:ea typeface="Calibri" pitchFamily="34" charset="-122"/>
                 <a:cs typeface="Calibri" pitchFamily="34" charset="-120"/>
               </a:rPr>
-              <a:t>Branche du ticket</a:t>
+              <a:t>Analyse → la fiche</a:t>
             </a:r>
             <a:endParaRPr lang="en-US" sz="1300" dirty="0"/>
           </a:p>
@@ -23750,11 +23750,11 @@
             </a:avLst>
           </a:prstGeom>
           <a:solidFill>
-            <a:srgbClr val="E4EEF8"/>
-          </a:solidFill>
-          <a:ln w="15875">
-            <a:solidFill>
-              <a:srgbClr val="2E6DA4"/>
+            <a:srgbClr val="F4F5F7"/>
+          </a:solidFill>
+          <a:ln w="15875">
+            <a:solidFill>
+              <a:srgbClr val="7A828C"/>
             </a:solidFill>
           </a:ln>
         </p:spPr>
@@ -23774,7 +23774,7 @@
                 <a:ea typeface="Calibri" pitchFamily="34" charset="-122"/>
                 <a:cs typeface="Calibri" pitchFamily="34" charset="-120"/>
               </a:rPr>
-              <a:t>Analyse → la fiche</a:t>
+              <a:t>Build et tests de develop</a:t>
             </a:r>
             <a:endParaRPr lang="en-US" sz="1300" dirty="0"/>
           </a:p>
@@ -23797,11 +23797,11 @@
             </a:avLst>
           </a:prstGeom>
           <a:solidFill>
-            <a:srgbClr val="F4F5F7"/>
-          </a:solidFill>
-          <a:ln w="15875">
-            <a:solidFill>
-              <a:srgbClr val="7A828C"/>
+            <a:srgbClr val="E4EEF8"/>
+          </a:solidFill>
+          <a:ln w="15875">
+            <a:solidFill>
+              <a:srgbClr val="2E6DA4"/>
             </a:solidFill>
           </a:ln>
         </p:spPr>
@@ -23821,7 +23821,7 @@
                 <a:ea typeface="Calibri" pitchFamily="34" charset="-122"/>
                 <a:cs typeface="Calibri" pitchFamily="34" charset="-120"/>
               </a:rPr>
-              <a:t>Build et tests de develop</a:t>
+              <a:t>Plan relu par un œil neuf</a:t>
             </a:r>
             <a:endParaRPr lang="en-US" sz="1300" dirty="0"/>
           </a:p>
@@ -24591,7 +24591,7 @@
                 <a:ea typeface="Calibri" pitchFamily="34" charset="-122"/>
                 <a:cs typeface="Calibri" pitchFamily="34" charset="-120"/>
               </a:rPr>
-              <a:t>Avant la première ligne de code : tout ce qui ferait échouer le ticket pour une raison extérieure.</a:t>
+              <a:t>Avant la première ligne de code : ce qui ferait échouer le ticket, et un plan relu par un œil neuf.</a:t>
             </a:r>
             <a:endParaRPr lang="en-US" sz="1500" dirty="0"/>
           </a:p>
@@ -24605,8 +24605,8 @@
         </p:nvSpPr>
         <p:spPr>
           <a:xfrm>
-            <a:off x="457200" y="2697480"/>
-            <a:ext cx="1371600" cy="822960"/>
+            <a:off x="411480" y="2697480"/>
+            <a:ext cx="1188720" cy="822960"/>
           </a:xfrm>
           <a:prstGeom prst="roundRect">
             <a:avLst>
@@ -24652,8 +24652,8 @@
         </p:nvSpPr>
         <p:spPr>
           <a:xfrm>
-            <a:off x="2194560" y="2697480"/>
-            <a:ext cx="1828800" cy="822960"/>
+            <a:off x="1828800" y="2697480"/>
+            <a:ext cx="1600200" cy="822960"/>
           </a:xfrm>
           <a:prstGeom prst="roundRect">
             <a:avLst>
@@ -24716,7 +24716,7 @@
         </p:nvSpPr>
         <p:spPr>
           <a:xfrm>
-            <a:off x="2715768" y="2542032"/>
+            <a:off x="2121408" y="2542032"/>
             <a:ext cx="1417320" cy="274320"/>
           </a:xfrm>
           <a:prstGeom prst="roundRect">
@@ -24764,12 +24764,12 @@
         </p:nvSpPr>
         <p:spPr>
           <a:xfrm>
-            <a:off x="4434840" y="1508760"/>
-            <a:ext cx="2606040" cy="3291840"/>
+            <a:off x="3611880" y="1508760"/>
+            <a:ext cx="2423160" cy="3291840"/>
           </a:xfrm>
           <a:prstGeom prst="roundRect">
             <a:avLst>
-              <a:gd name="adj" fmla="val 3509"/>
+              <a:gd name="adj" fmla="val 3774"/>
             </a:avLst>
           </a:prstGeom>
           <a:solidFill>
@@ -24793,8 +24793,8 @@
         </p:nvSpPr>
         <p:spPr>
           <a:xfrm>
-            <a:off x="4544568" y="1545336"/>
-            <a:ext cx="2386584" cy="237744"/>
+            <a:off x="3721608" y="1545336"/>
+            <a:ext cx="2203704" cy="237744"/>
           </a:xfrm>
           <a:prstGeom prst="rect">
             <a:avLst/>
@@ -24832,8 +24832,8 @@
         </p:nvSpPr>
         <p:spPr>
           <a:xfrm>
-            <a:off x="4617720" y="1874520"/>
-            <a:ext cx="2240280" cy="868680"/>
+            <a:off x="3749040" y="1874520"/>
+            <a:ext cx="2148840" cy="868680"/>
           </a:xfrm>
           <a:prstGeom prst="roundRect">
             <a:avLst>
@@ -24896,7 +24896,7 @@
         </p:nvSpPr>
         <p:spPr>
           <a:xfrm>
-            <a:off x="5596128" y="1719072"/>
+            <a:off x="4636008" y="1719072"/>
             <a:ext cx="1371600" cy="274320"/>
           </a:xfrm>
           <a:prstGeom prst="roundRect">
@@ -24944,8 +24944,8 @@
         </p:nvSpPr>
         <p:spPr>
           <a:xfrm>
-            <a:off x="4617720" y="3429000"/>
-            <a:ext cx="2240280" cy="868680"/>
+            <a:off x="3749040" y="3429000"/>
+            <a:ext cx="2148840" cy="868680"/>
           </a:xfrm>
           <a:prstGeom prst="roundRect">
             <a:avLst>
@@ -25008,7 +25008,7 @@
         </p:nvSpPr>
         <p:spPr>
           <a:xfrm>
-            <a:off x="5916168" y="3273552"/>
+            <a:off x="4956048" y="3273552"/>
             <a:ext cx="1051560" cy="274320"/>
           </a:xfrm>
           <a:prstGeom prst="roundRect">
@@ -25050,14 +25050,182 @@
       </p:sp>
       <p:sp>
         <p:nvSpPr>
-          <p:cNvPr id="14" name="q"/>
-          <p:cNvSpPr/>
-          <p:nvPr/>
-        </p:nvSpPr>
-        <p:spPr>
-          <a:xfrm>
-            <a:off x="7406640" y="2514600"/>
-            <a:ext cx="1783080" cy="1188720"/>
+          <p:cNvPr id="14" name="rl"/>
+          <p:cNvSpPr/>
+          <p:nvPr/>
+        </p:nvSpPr>
+        <p:spPr>
+          <a:xfrm>
+            <a:off x="6355080" y="2651760"/>
+            <a:ext cx="1828800" cy="914400"/>
+          </a:xfrm>
+          <a:prstGeom prst="roundRect">
+            <a:avLst>
+              <a:gd name="adj" fmla="val 8000"/>
+            </a:avLst>
+          </a:prstGeom>
+          <a:solidFill>
+            <a:srgbClr val="E4EEF8"/>
+          </a:solidFill>
+          <a:ln w="15875">
+            <a:solidFill>
+              <a:srgbClr val="2E6DA4"/>
+            </a:solidFill>
+          </a:ln>
+        </p:spPr>
+        <p:txBody>
+          <a:bodyPr wrap="square" lIns="38100" tIns="38100" rIns="38100" bIns="38100" rtlCol="0" anchor="ctr"/>
+          <a:lstStyle/>
+          <a:p>
+            <a:pPr algn="ctr" indent="0" marL="0">
+              <a:buNone/>
+            </a:pPr>
+            <a:r>
+              <a:rPr lang="en-US" sz="1300" b="1" dirty="0">
+                <a:solidFill>
+                  <a:srgbClr val="1F2933"/>
+                </a:solidFill>
+                <a:latin typeface="Calibri" pitchFamily="34" charset="0"/>
+                <a:ea typeface="Calibri" pitchFamily="34" charset="-122"/>
+                <a:cs typeface="Calibri" pitchFamily="34" charset="-120"/>
+              </a:rPr>
+              <a:t>checker</a:t>
+            </a:r>
+            <a:endParaRPr lang="en-US" sz="1300" dirty="0"/>
+          </a:p>
+          <a:p>
+            <a:pPr algn="ctr" indent="0" marL="0">
+              <a:buNone/>
+            </a:pPr>
+            <a:r>
+              <a:rPr lang="en-US" sz="1100" dirty="0">
+                <a:solidFill>
+                  <a:srgbClr val="3E4C59"/>
+                </a:solidFill>
+                <a:latin typeface="Calibri" pitchFamily="34" charset="0"/>
+                <a:ea typeface="Calibri" pitchFamily="34" charset="-122"/>
+                <a:cs typeface="Calibri" pitchFamily="34" charset="-120"/>
+              </a:rPr>
+              <a:t>relit le plan à neuf : fiche, ticket, code</a:t>
+            </a:r>
+            <a:endParaRPr lang="en-US" sz="1300" dirty="0"/>
+          </a:p>
+        </p:txBody>
+      </p:sp>
+      <p:sp>
+        <p:nvSpPr>
+          <p:cNvPr id="15" name="tag-6"/>
+          <p:cNvSpPr/>
+          <p:nvPr/>
+        </p:nvSpPr>
+        <p:spPr>
+          <a:xfrm>
+            <a:off x="6967728" y="2496312"/>
+            <a:ext cx="1325880" cy="274320"/>
+          </a:xfrm>
+          <a:prstGeom prst="roundRect">
+            <a:avLst>
+              <a:gd name="adj" fmla="val 50000"/>
+            </a:avLst>
+          </a:prstGeom>
+          <a:solidFill>
+            <a:srgbClr val="FFFFFF"/>
+          </a:solidFill>
+          <a:ln w="12700">
+            <a:solidFill>
+              <a:srgbClr val="A3AAB3"/>
+            </a:solidFill>
+            <a:prstDash val="solid"/>
+          </a:ln>
+        </p:spPr>
+        <p:txBody>
+          <a:bodyPr wrap="square" lIns="0" tIns="0" rIns="0" bIns="0" rtlCol="0" anchor="ctr"/>
+          <a:lstStyle/>
+          <a:p>
+            <a:pPr algn="ctr" indent="0" marL="0">
+              <a:buNone/>
+            </a:pPr>
+            <a:r>
+              <a:rPr lang="en-US" sz="1050" b="1" dirty="0">
+                <a:solidFill>
+                  <a:srgbClr val="5B6470"/>
+                </a:solidFill>
+                <a:latin typeface="Calibri" pitchFamily="34" charset="0"/>
+                <a:ea typeface="Calibri" pitchFamily="34" charset="-122"/>
+                <a:cs typeface="Calibri" pitchFamily="34" charset="-120"/>
+              </a:rPr>
+              <a:t>sans voir l'analyse</a:t>
+            </a:r>
+            <a:endParaRPr lang="en-US" sz="1050" dirty="0"/>
+          </a:p>
+        </p:txBody>
+      </p:sp>
+      <p:sp>
+        <p:nvSpPr>
+          <p:cNvPr id="16" name="label-7"/>
+          <p:cNvSpPr txBox="1"/>
+          <p:nvPr/>
+        </p:nvSpPr>
+        <p:spPr>
+          <a:xfrm>
+            <a:off x="6355080" y="3657600"/>
+            <a:ext cx="1828800" cy="457200"/>
+          </a:xfrm>
+          <a:prstGeom prst="rect">
+            <a:avLst/>
+          </a:prstGeom>
+          <a:noFill/>
+          <a:ln/>
+        </p:spPr>
+        <p:txBody>
+          <a:bodyPr wrap="square" lIns="0" tIns="0" rIns="0" bIns="0" rtlCol="0" anchor="ctr"/>
+          <a:lstStyle/>
+          <a:p>
+            <a:pPr algn="ctr" indent="0" marL="0">
+              <a:buNone/>
+            </a:pPr>
+            <a:r>
+              <a:rPr lang="en-US" sz="1050" dirty="0">
+                <a:solidFill>
+                  <a:srgbClr val="5B6470"/>
+                </a:solidFill>
+                <a:latin typeface="Calibri" pitchFamily="34" charset="0"/>
+                <a:ea typeface="Calibri" pitchFamily="34" charset="-122"/>
+                <a:cs typeface="Calibri" pitchFamily="34" charset="-120"/>
+              </a:rPr>
+              <a:t>des points : l'analyst corrige,</a:t>
+            </a:r>
+            <a:endParaRPr lang="en-US" sz="1050" dirty="0"/>
+          </a:p>
+          <a:p>
+            <a:pPr algn="ctr" indent="0" marL="0">
+              <a:buNone/>
+            </a:pPr>
+            <a:r>
+              <a:rPr lang="en-US" sz="1050" dirty="0">
+                <a:solidFill>
+                  <a:srgbClr val="5B6470"/>
+                </a:solidFill>
+                <a:latin typeface="Calibri" pitchFamily="34" charset="0"/>
+                <a:ea typeface="Calibri" pitchFamily="34" charset="-122"/>
+                <a:cs typeface="Calibri" pitchFamily="34" charset="-120"/>
+              </a:rPr>
+              <a:t>ou prouve qu'il a raison · 1 tour</a:t>
+            </a:r>
+            <a:endParaRPr lang="en-US" sz="1050" dirty="0"/>
+          </a:p>
+        </p:txBody>
+      </p:sp>
+      <p:sp>
+        <p:nvSpPr>
+          <p:cNvPr id="17" name="q"/>
+          <p:cNvSpPr/>
+          <p:nvPr/>
+        </p:nvSpPr>
+        <p:spPr>
+          <a:xfrm>
+            <a:off x="8339328" y="2468880"/>
+            <a:ext cx="1645920" cy="1280160"/>
           </a:xfrm>
           <a:prstGeom prst="diamond">
             <a:avLst/>
@@ -25079,7 +25247,7 @@
               <a:buNone/>
             </a:pPr>
             <a:r>
-              <a:rPr lang="en-US" sz="1200" b="1" dirty="0">
+              <a:rPr lang="en-US" sz="1100" b="1" dirty="0">
                 <a:solidFill>
                   <a:srgbClr val="1F2933"/>
                 </a:solidFill>
@@ -25089,14 +25257,14 @@
               </a:rPr>
               <a:t>Questions</a:t>
             </a:r>
-            <a:endParaRPr lang="en-US" sz="1200" dirty="0"/>
-          </a:p>
-          <a:p>
-            <a:pPr algn="ctr" indent="0" marL="0">
-              <a:buNone/>
-            </a:pPr>
-            <a:r>
-              <a:rPr lang="en-US" sz="1200" b="1" dirty="0">
+            <a:endParaRPr lang="en-US" sz="1100" dirty="0"/>
+          </a:p>
+          <a:p>
+            <a:pPr algn="ctr" indent="0" marL="0">
+              <a:buNone/>
+            </a:pPr>
+            <a:r>
+              <a:rPr lang="en-US" sz="1100" b="1" dirty="0">
                 <a:solidFill>
                   <a:srgbClr val="1F2933"/>
                 </a:solidFill>
@@ -25106,20 +25274,20 @@
               </a:rPr>
               <a:t>bloquantes ?</a:t>
             </a:r>
-            <a:endParaRPr lang="en-US" sz="1200" dirty="0"/>
-          </a:p>
-        </p:txBody>
-      </p:sp>
-      <p:sp>
-        <p:nvSpPr>
-          <p:cNvPr id="15" name="qcm"/>
-          <p:cNvSpPr/>
-          <p:nvPr/>
-        </p:nvSpPr>
-        <p:spPr>
-          <a:xfrm>
-            <a:off x="9418320" y="1691640"/>
-            <a:ext cx="2286000" cy="822960"/>
+            <a:endParaRPr lang="en-US" sz="1100" dirty="0"/>
+          </a:p>
+        </p:txBody>
+      </p:sp>
+      <p:sp>
+        <p:nvSpPr>
+          <p:cNvPr id="18" name="qcm"/>
+          <p:cNvSpPr/>
+          <p:nvPr/>
+        </p:nvSpPr>
+        <p:spPr>
+          <a:xfrm>
+            <a:off x="10058400" y="1691640"/>
+            <a:ext cx="1737360" cy="822960"/>
           </a:xfrm>
           <a:prstGeom prst="roundRect">
             <a:avLst>
@@ -25143,7 +25311,7 @@
               <a:buNone/>
             </a:pPr>
             <a:r>
-              <a:rPr lang="en-US" sz="1300" b="1" dirty="0">
+              <a:rPr lang="en-US" sz="1200" b="1" dirty="0">
                 <a:solidFill>
                   <a:srgbClr val="1F2933"/>
                 </a:solidFill>
@@ -25153,14 +25321,14 @@
               </a:rPr>
               <a:t>❓ Un seul QCM</a:t>
             </a:r>
-            <a:endParaRPr lang="en-US" sz="1300" dirty="0"/>
-          </a:p>
-          <a:p>
-            <a:pPr algn="ctr" indent="0" marL="0">
-              <a:buNone/>
-            </a:pPr>
-            <a:r>
-              <a:rPr lang="en-US" sz="1100" dirty="0">
+            <a:endParaRPr lang="en-US" sz="1200" dirty="0"/>
+          </a:p>
+          <a:p>
+            <a:pPr algn="ctr" indent="0" marL="0">
+              <a:buNone/>
+            </a:pPr>
+            <a:r>
+              <a:rPr lang="en-US" sz="1000" dirty="0">
                 <a:solidFill>
                   <a:srgbClr val="3E4C59"/>
                 </a:solidFill>
@@ -25170,20 +25338,20 @@
               </a:rPr>
               <a:t>ou « je demande au PO »</a:t>
             </a:r>
-            <a:endParaRPr lang="en-US" sz="1300" dirty="0"/>
-          </a:p>
-        </p:txBody>
-      </p:sp>
-      <p:sp>
-        <p:nvSpPr>
-          <p:cNvPr id="16" name="plan"/>
-          <p:cNvSpPr/>
-          <p:nvPr/>
-        </p:nvSpPr>
-        <p:spPr>
-          <a:xfrm>
-            <a:off x="9418320" y="4069080"/>
-            <a:ext cx="2286000" cy="822960"/>
+            <a:endParaRPr lang="en-US" sz="1200" dirty="0"/>
+          </a:p>
+        </p:txBody>
+      </p:sp>
+      <p:sp>
+        <p:nvSpPr>
+          <p:cNvPr id="19" name="plan"/>
+          <p:cNvSpPr/>
+          <p:nvPr/>
+        </p:nvSpPr>
+        <p:spPr>
+          <a:xfrm>
+            <a:off x="10058400" y="4069080"/>
+            <a:ext cx="1737360" cy="822960"/>
           </a:xfrm>
           <a:prstGeom prst="roundRect">
             <a:avLst>
@@ -25240,14 +25408,14 @@
       </p:sp>
       <p:sp>
         <p:nvSpPr>
-          <p:cNvPr id="17" name="s1"/>
-          <p:cNvSpPr/>
-          <p:nvPr/>
-        </p:nvSpPr>
-        <p:spPr>
-          <a:xfrm>
-            <a:off x="2514600" y="5257800"/>
-            <a:ext cx="2057400" cy="685800"/>
+          <p:cNvPr id="20" name="s1"/>
+          <p:cNvSpPr/>
+          <p:nvPr/>
+        </p:nvSpPr>
+        <p:spPr>
+          <a:xfrm>
+            <a:off x="2057400" y="5257800"/>
+            <a:ext cx="1965960" cy="685800"/>
           </a:xfrm>
           <a:prstGeom prst="roundRect">
             <a:avLst>
@@ -25304,14 +25472,14 @@
       </p:sp>
       <p:sp>
         <p:nvSpPr>
-          <p:cNvPr id="18" name="s2"/>
-          <p:cNvSpPr/>
-          <p:nvPr/>
-        </p:nvSpPr>
-        <p:spPr>
-          <a:xfrm>
-            <a:off x="4709160" y="5257800"/>
-            <a:ext cx="1965960" cy="685800"/>
+          <p:cNvPr id="21" name="s2"/>
+          <p:cNvSpPr/>
+          <p:nvPr/>
+        </p:nvSpPr>
+        <p:spPr>
+          <a:xfrm>
+            <a:off x="4160520" y="5257800"/>
+            <a:ext cx="1920240" cy="685800"/>
           </a:xfrm>
           <a:prstGeom prst="roundRect">
             <a:avLst>
@@ -25368,14 +25536,14 @@
       </p:sp>
       <p:sp>
         <p:nvSpPr>
-          <p:cNvPr id="19" name="s3"/>
-          <p:cNvSpPr/>
-          <p:nvPr/>
-        </p:nvSpPr>
-        <p:spPr>
-          <a:xfrm>
-            <a:off x="6812280" y="5257800"/>
-            <a:ext cx="2011680" cy="685800"/>
+          <p:cNvPr id="22" name="s3"/>
+          <p:cNvSpPr/>
+          <p:nvPr/>
+        </p:nvSpPr>
+        <p:spPr>
+          <a:xfrm>
+            <a:off x="6217920" y="5257800"/>
+            <a:ext cx="1965960" cy="685800"/>
           </a:xfrm>
           <a:prstGeom prst="roundRect">
             <a:avLst>
@@ -25432,14 +25600,14 @@
       </p:sp>
       <p:sp>
         <p:nvSpPr>
-          <p:cNvPr id="20" name="wire-6"/>
-          <p:cNvSpPr/>
-          <p:nvPr/>
-        </p:nvSpPr>
-        <p:spPr>
-          <a:xfrm>
-            <a:off x="1828800" y="3108960"/>
-            <a:ext cx="365760" cy="0"/>
+          <p:cNvPr id="23" name="wire-8"/>
+          <p:cNvSpPr/>
+          <p:nvPr/>
+        </p:nvSpPr>
+        <p:spPr>
+          <a:xfrm>
+            <a:off x="1600200" y="3108960"/>
+            <a:ext cx="228600" cy="0"/>
           </a:xfrm>
           <a:prstGeom prst="line">
             <a:avLst/>
@@ -25456,14 +25624,14 @@
       </p:sp>
       <p:sp>
         <p:nvSpPr>
-          <p:cNvPr id="21" name="wire-7"/>
+          <p:cNvPr id="24" name="wire-9"/>
           <p:cNvSpPr/>
           <p:nvPr/>
         </p:nvSpPr>
         <p:spPr>
           <a:xfrm flipV="1">
-            <a:off x="4023360" y="3108960"/>
-            <a:ext cx="274320" cy="0"/>
+            <a:off x="3429000" y="3108960"/>
+            <a:ext cx="91440" cy="0"/>
           </a:xfrm>
           <a:prstGeom prst="line">
             <a:avLst/>
@@ -25479,13 +25647,13 @@
       </p:sp>
       <p:sp>
         <p:nvSpPr>
-          <p:cNvPr id="22" name="wire-8"/>
-          <p:cNvSpPr/>
-          <p:nvPr/>
-        </p:nvSpPr>
-        <p:spPr>
-          <a:xfrm>
-            <a:off x="4297680" y="2304288"/>
+          <p:cNvPr id="25" name="wire-10"/>
+          <p:cNvSpPr/>
+          <p:nvPr/>
+        </p:nvSpPr>
+        <p:spPr>
+          <a:xfrm>
+            <a:off x="3520440" y="2304288"/>
             <a:ext cx="0" cy="1554480"/>
           </a:xfrm>
           <a:prstGeom prst="line">
@@ -25502,14 +25670,14 @@
       </p:sp>
       <p:sp>
         <p:nvSpPr>
-          <p:cNvPr id="23" name="wire-9"/>
-          <p:cNvSpPr/>
-          <p:nvPr/>
-        </p:nvSpPr>
-        <p:spPr>
-          <a:xfrm>
-            <a:off x="4297680" y="2304288"/>
-            <a:ext cx="320040" cy="4572"/>
+          <p:cNvPr id="26" name="wire-11"/>
+          <p:cNvSpPr/>
+          <p:nvPr/>
+        </p:nvSpPr>
+        <p:spPr>
+          <a:xfrm>
+            <a:off x="3520440" y="2304288"/>
+            <a:ext cx="228600" cy="4572"/>
           </a:xfrm>
           <a:prstGeom prst="line">
             <a:avLst/>
@@ -25526,14 +25694,14 @@
       </p:sp>
       <p:sp>
         <p:nvSpPr>
-          <p:cNvPr id="24" name="wire-10"/>
-          <p:cNvSpPr/>
-          <p:nvPr/>
-        </p:nvSpPr>
-        <p:spPr>
-          <a:xfrm>
-            <a:off x="4297680" y="3858768"/>
-            <a:ext cx="320040" cy="4572"/>
+          <p:cNvPr id="27" name="wire-12"/>
+          <p:cNvSpPr/>
+          <p:nvPr/>
+        </p:nvSpPr>
+        <p:spPr>
+          <a:xfrm>
+            <a:off x="3520440" y="3858768"/>
+            <a:ext cx="228600" cy="4572"/>
           </a:xfrm>
           <a:prstGeom prst="line">
             <a:avLst/>
@@ -25550,14 +25718,14 @@
       </p:sp>
       <p:sp>
         <p:nvSpPr>
-          <p:cNvPr id="25" name="wire-11"/>
+          <p:cNvPr id="28" name="wire-13"/>
           <p:cNvSpPr/>
           <p:nvPr/>
         </p:nvSpPr>
         <p:spPr>
           <a:xfrm flipV="1">
-            <a:off x="6858000" y="2304288"/>
-            <a:ext cx="411480" cy="4572"/>
+            <a:off x="5897880" y="2304288"/>
+            <a:ext cx="274320" cy="4572"/>
           </a:xfrm>
           <a:prstGeom prst="line">
             <a:avLst/>
@@ -25573,14 +25741,14 @@
       </p:sp>
       <p:sp>
         <p:nvSpPr>
-          <p:cNvPr id="26" name="wire-12"/>
+          <p:cNvPr id="29" name="wire-14"/>
           <p:cNvSpPr/>
           <p:nvPr/>
         </p:nvSpPr>
         <p:spPr>
           <a:xfrm flipV="1">
-            <a:off x="6858000" y="3858768"/>
-            <a:ext cx="411480" cy="4572"/>
+            <a:off x="5897880" y="3858768"/>
+            <a:ext cx="274320" cy="4572"/>
           </a:xfrm>
           <a:prstGeom prst="line">
             <a:avLst/>
@@ -25596,13 +25764,13 @@
       </p:sp>
       <p:sp>
         <p:nvSpPr>
-          <p:cNvPr id="27" name="wire-13"/>
-          <p:cNvSpPr/>
-          <p:nvPr/>
-        </p:nvSpPr>
-        <p:spPr>
-          <a:xfrm>
-            <a:off x="7269480" y="2304288"/>
+          <p:cNvPr id="30" name="wire-15"/>
+          <p:cNvSpPr/>
+          <p:nvPr/>
+        </p:nvSpPr>
+        <p:spPr>
+          <a:xfrm>
+            <a:off x="6172200" y="2304288"/>
             <a:ext cx="0" cy="1554480"/>
           </a:xfrm>
           <a:prstGeom prst="line">
@@ -25619,14 +25787,14 @@
       </p:sp>
       <p:sp>
         <p:nvSpPr>
-          <p:cNvPr id="28" name="wire-14"/>
-          <p:cNvSpPr/>
-          <p:nvPr/>
-        </p:nvSpPr>
-        <p:spPr>
-          <a:xfrm>
-            <a:off x="7269480" y="3108960"/>
-            <a:ext cx="137160" cy="0"/>
+          <p:cNvPr id="31" name="wire-16"/>
+          <p:cNvSpPr/>
+          <p:nvPr/>
+        </p:nvSpPr>
+        <p:spPr>
+          <a:xfrm>
+            <a:off x="6172200" y="3108960"/>
+            <a:ext cx="182880" cy="0"/>
           </a:xfrm>
           <a:prstGeom prst="line">
             <a:avLst/>
@@ -25643,60 +25811,14 @@
       </p:sp>
       <p:sp>
         <p:nvSpPr>
-          <p:cNvPr id="29" name="wire-15"/>
-          <p:cNvSpPr/>
-          <p:nvPr/>
-        </p:nvSpPr>
-        <p:spPr>
-          <a:xfrm flipH="1">
-            <a:off x="5733288" y="4297680"/>
-            <a:ext cx="4572" cy="594360"/>
-          </a:xfrm>
-          <a:prstGeom prst="line">
-            <a:avLst/>
-          </a:prstGeom>
-          <a:noFill/>
-          <a:ln w="15875">
-            <a:solidFill>
-              <a:srgbClr val="6B7280"/>
-            </a:solidFill>
-            <a:prstDash val="solid"/>
-          </a:ln>
-        </p:spPr>
-      </p:sp>
-      <p:sp>
-        <p:nvSpPr>
-          <p:cNvPr id="30" name="wire-16"/>
-          <p:cNvSpPr/>
-          <p:nvPr/>
-        </p:nvSpPr>
-        <p:spPr>
-          <a:xfrm>
-            <a:off x="3543300" y="4892040"/>
-            <a:ext cx="4274820" cy="0"/>
-          </a:xfrm>
-          <a:prstGeom prst="line">
-            <a:avLst/>
-          </a:prstGeom>
-          <a:noFill/>
-          <a:ln w="15875">
-            <a:solidFill>
-              <a:srgbClr val="6B7280"/>
-            </a:solidFill>
-            <a:prstDash val="solid"/>
-          </a:ln>
-        </p:spPr>
-      </p:sp>
-      <p:sp>
-        <p:nvSpPr>
-          <p:cNvPr id="31" name="wire-17"/>
-          <p:cNvSpPr/>
-          <p:nvPr/>
-        </p:nvSpPr>
-        <p:spPr>
-          <a:xfrm>
-            <a:off x="3543300" y="4892040"/>
-            <a:ext cx="0" cy="365760"/>
+          <p:cNvPr id="32" name="wire-17"/>
+          <p:cNvSpPr/>
+          <p:nvPr/>
+        </p:nvSpPr>
+        <p:spPr>
+          <a:xfrm>
+            <a:off x="8183880" y="3108960"/>
+            <a:ext cx="155448" cy="0"/>
           </a:xfrm>
           <a:prstGeom prst="line">
             <a:avLst/>
@@ -25713,13 +25835,59 @@
       </p:sp>
       <p:sp>
         <p:nvSpPr>
-          <p:cNvPr id="32" name="wire-18"/>
-          <p:cNvSpPr/>
-          <p:nvPr/>
-        </p:nvSpPr>
-        <p:spPr>
-          <a:xfrm>
-            <a:off x="5692140" y="4892040"/>
+          <p:cNvPr id="33" name="wire-18"/>
+          <p:cNvSpPr/>
+          <p:nvPr/>
+        </p:nvSpPr>
+        <p:spPr>
+          <a:xfrm>
+            <a:off x="4823460" y="4297680"/>
+            <a:ext cx="0" cy="594360"/>
+          </a:xfrm>
+          <a:prstGeom prst="line">
+            <a:avLst/>
+          </a:prstGeom>
+          <a:noFill/>
+          <a:ln w="15875">
+            <a:solidFill>
+              <a:srgbClr val="6B7280"/>
+            </a:solidFill>
+            <a:prstDash val="solid"/>
+          </a:ln>
+        </p:spPr>
+      </p:sp>
+      <p:sp>
+        <p:nvSpPr>
+          <p:cNvPr id="34" name="wire-19"/>
+          <p:cNvSpPr/>
+          <p:nvPr/>
+        </p:nvSpPr>
+        <p:spPr>
+          <a:xfrm>
+            <a:off x="3040380" y="4892040"/>
+            <a:ext cx="4160520" cy="0"/>
+          </a:xfrm>
+          <a:prstGeom prst="line">
+            <a:avLst/>
+          </a:prstGeom>
+          <a:noFill/>
+          <a:ln w="15875">
+            <a:solidFill>
+              <a:srgbClr val="6B7280"/>
+            </a:solidFill>
+            <a:prstDash val="solid"/>
+          </a:ln>
+        </p:spPr>
+      </p:sp>
+      <p:sp>
+        <p:nvSpPr>
+          <p:cNvPr id="35" name="wire-20"/>
+          <p:cNvSpPr/>
+          <p:nvPr/>
+        </p:nvSpPr>
+        <p:spPr>
+          <a:xfrm>
+            <a:off x="3040380" y="4892040"/>
             <a:ext cx="0" cy="365760"/>
           </a:xfrm>
           <a:prstGeom prst="line">
@@ -25737,13 +25905,13 @@
       </p:sp>
       <p:sp>
         <p:nvSpPr>
-          <p:cNvPr id="33" name="wire-19"/>
-          <p:cNvSpPr/>
-          <p:nvPr/>
-        </p:nvSpPr>
-        <p:spPr>
-          <a:xfrm>
-            <a:off x="7818120" y="4892040"/>
+          <p:cNvPr id="36" name="wire-21"/>
+          <p:cNvSpPr/>
+          <p:nvPr/>
+        </p:nvSpPr>
+        <p:spPr>
+          <a:xfrm>
+            <a:off x="5120640" y="4892040"/>
             <a:ext cx="0" cy="365760"/>
           </a:xfrm>
           <a:prstGeom prst="line">
@@ -25761,37 +25929,14 @@
       </p:sp>
       <p:sp>
         <p:nvSpPr>
-          <p:cNvPr id="34" name="wire-20"/>
-          <p:cNvSpPr/>
-          <p:nvPr/>
-        </p:nvSpPr>
-        <p:spPr>
-          <a:xfrm flipV="1">
-            <a:off x="8298180" y="2103120"/>
-            <a:ext cx="0" cy="411480"/>
-          </a:xfrm>
-          <a:prstGeom prst="line">
-            <a:avLst/>
-          </a:prstGeom>
-          <a:noFill/>
-          <a:ln w="15875">
-            <a:solidFill>
-              <a:srgbClr val="6B7280"/>
-            </a:solidFill>
-            <a:prstDash val="solid"/>
-          </a:ln>
-        </p:spPr>
-      </p:sp>
-      <p:sp>
-        <p:nvSpPr>
-          <p:cNvPr id="35" name="wire-21"/>
-          <p:cNvSpPr/>
-          <p:nvPr/>
-        </p:nvSpPr>
-        <p:spPr>
-          <a:xfrm>
-            <a:off x="8298180" y="2103120"/>
-            <a:ext cx="1120140" cy="0"/>
+          <p:cNvPr id="37" name="wire-22"/>
+          <p:cNvSpPr/>
+          <p:nvPr/>
+        </p:nvSpPr>
+        <p:spPr>
+          <a:xfrm>
+            <a:off x="7200900" y="4892040"/>
+            <a:ext cx="0" cy="365760"/>
           </a:xfrm>
           <a:prstGeom prst="line">
             <a:avLst/>
@@ -25808,53 +25953,14 @@
       </p:sp>
       <p:sp>
         <p:nvSpPr>
-          <p:cNvPr id="36" name="label-22"/>
-          <p:cNvSpPr txBox="1"/>
-          <p:nvPr/>
-        </p:nvSpPr>
-        <p:spPr>
-          <a:xfrm>
-            <a:off x="8412480" y="2176272"/>
-            <a:ext cx="548640" cy="237744"/>
-          </a:xfrm>
-          <a:prstGeom prst="rect">
-            <a:avLst/>
-          </a:prstGeom>
-          <a:noFill/>
-          <a:ln/>
-        </p:spPr>
-        <p:txBody>
-          <a:bodyPr wrap="square" lIns="0" tIns="0" rIns="0" bIns="0" rtlCol="0" anchor="ctr"/>
-          <a:lstStyle/>
-          <a:p>
-            <a:pPr algn="l" indent="0" marL="0">
-              <a:buNone/>
-            </a:pPr>
-            <a:r>
-              <a:rPr lang="en-US" sz="1050" dirty="0">
-                <a:solidFill>
-                  <a:srgbClr val="5B6470"/>
-                </a:solidFill>
-                <a:latin typeface="Calibri" pitchFamily="34" charset="0"/>
-                <a:ea typeface="Calibri" pitchFamily="34" charset="-122"/>
-                <a:cs typeface="Calibri" pitchFamily="34" charset="-120"/>
-              </a:rPr>
-              <a:t>oui</a:t>
-            </a:r>
-            <a:endParaRPr lang="en-US" sz="1050" dirty="0"/>
-          </a:p>
-        </p:txBody>
-      </p:sp>
-      <p:sp>
-        <p:nvSpPr>
-          <p:cNvPr id="37" name="wire-23"/>
-          <p:cNvSpPr/>
-          <p:nvPr/>
-        </p:nvSpPr>
-        <p:spPr>
-          <a:xfrm>
-            <a:off x="8298180" y="3703320"/>
-            <a:ext cx="0" cy="777240"/>
+          <p:cNvPr id="38" name="wire-23"/>
+          <p:cNvSpPr/>
+          <p:nvPr/>
+        </p:nvSpPr>
+        <p:spPr>
+          <a:xfrm flipV="1">
+            <a:off x="9162288" y="2103120"/>
+            <a:ext cx="0" cy="365760"/>
           </a:xfrm>
           <a:prstGeom prst="line">
             <a:avLst/>
@@ -25870,14 +25976,14 @@
       </p:sp>
       <p:sp>
         <p:nvSpPr>
-          <p:cNvPr id="38" name="wire-24"/>
-          <p:cNvSpPr/>
-          <p:nvPr/>
-        </p:nvSpPr>
-        <p:spPr>
-          <a:xfrm>
-            <a:off x="8298180" y="4480560"/>
-            <a:ext cx="1120140" cy="0"/>
+          <p:cNvPr id="39" name="wire-24"/>
+          <p:cNvSpPr/>
+          <p:nvPr/>
+        </p:nvSpPr>
+        <p:spPr>
+          <a:xfrm>
+            <a:off x="9162288" y="2103120"/>
+            <a:ext cx="896112" cy="0"/>
           </a:xfrm>
           <a:prstGeom prst="line">
             <a:avLst/>
@@ -25894,13 +26000,13 @@
       </p:sp>
       <p:sp>
         <p:nvSpPr>
-          <p:cNvPr id="39" name="label-25"/>
+          <p:cNvPr id="40" name="label-25"/>
           <p:cNvSpPr txBox="1"/>
           <p:nvPr/>
         </p:nvSpPr>
         <p:spPr>
           <a:xfrm>
-            <a:off x="8412480" y="4160520"/>
+            <a:off x="9253728" y="2176272"/>
             <a:ext cx="548640" cy="237744"/>
           </a:xfrm>
           <a:prstGeom prst="rect">
@@ -25925,7 +26031,7 @@
                 <a:ea typeface="Calibri" pitchFamily="34" charset="-122"/>
                 <a:cs typeface="Calibri" pitchFamily="34" charset="-120"/>
               </a:rPr>
-              <a:t>non</a:t>
+              <a:t>oui</a:t>
             </a:r>
             <a:endParaRPr lang="en-US" sz="1050" dirty="0"/>
           </a:p>
@@ -25933,14 +26039,37 @@
       </p:sp>
       <p:sp>
         <p:nvSpPr>
-          <p:cNvPr id="40" name="wire-26"/>
-          <p:cNvSpPr/>
-          <p:nvPr/>
-        </p:nvSpPr>
-        <p:spPr>
-          <a:xfrm>
-            <a:off x="10561320" y="2514600"/>
-            <a:ext cx="0" cy="1554480"/>
+          <p:cNvPr id="41" name="wire-26"/>
+          <p:cNvSpPr/>
+          <p:nvPr/>
+        </p:nvSpPr>
+        <p:spPr>
+          <a:xfrm>
+            <a:off x="9162288" y="3749040"/>
+            <a:ext cx="0" cy="731520"/>
+          </a:xfrm>
+          <a:prstGeom prst="line">
+            <a:avLst/>
+          </a:prstGeom>
+          <a:noFill/>
+          <a:ln w="15875">
+            <a:solidFill>
+              <a:srgbClr val="6B7280"/>
+            </a:solidFill>
+            <a:prstDash val="solid"/>
+          </a:ln>
+        </p:spPr>
+      </p:sp>
+      <p:sp>
+        <p:nvSpPr>
+          <p:cNvPr id="42" name="wire-27"/>
+          <p:cNvSpPr/>
+          <p:nvPr/>
+        </p:nvSpPr>
+        <p:spPr>
+          <a:xfrm>
+            <a:off x="9162288" y="4480560"/>
+            <a:ext cx="896112" cy="0"/>
           </a:xfrm>
           <a:prstGeom prst="line">
             <a:avLst/>
@@ -25957,14 +26086,14 @@
       </p:sp>
       <p:sp>
         <p:nvSpPr>
-          <p:cNvPr id="41" name="label-27"/>
+          <p:cNvPr id="43" name="label-28"/>
           <p:cNvSpPr txBox="1"/>
           <p:nvPr/>
         </p:nvSpPr>
         <p:spPr>
           <a:xfrm>
-            <a:off x="10652760" y="2926080"/>
-            <a:ext cx="1097280" cy="502920"/>
+            <a:off x="9253728" y="4160520"/>
+            <a:ext cx="548640" cy="237744"/>
           </a:xfrm>
           <a:prstGeom prst="rect">
             <a:avLst/>
@@ -25988,16 +26117,79 @@
                 <a:ea typeface="Calibri" pitchFamily="34" charset="-122"/>
                 <a:cs typeface="Calibri" pitchFamily="34" charset="-120"/>
               </a:rPr>
+              <a:t>non</a:t>
+            </a:r>
+            <a:endParaRPr lang="en-US" sz="1050" dirty="0"/>
+          </a:p>
+        </p:txBody>
+      </p:sp>
+      <p:sp>
+        <p:nvSpPr>
+          <p:cNvPr id="44" name="wire-29"/>
+          <p:cNvSpPr/>
+          <p:nvPr/>
+        </p:nvSpPr>
+        <p:spPr>
+          <a:xfrm>
+            <a:off x="10927080" y="2514600"/>
+            <a:ext cx="0" cy="1554480"/>
+          </a:xfrm>
+          <a:prstGeom prst="line">
+            <a:avLst/>
+          </a:prstGeom>
+          <a:noFill/>
+          <a:ln w="15875">
+            <a:solidFill>
+              <a:srgbClr val="6B7280"/>
+            </a:solidFill>
+            <a:prstDash val="solid"/>
+            <a:tailEnd type="triangle"/>
+          </a:ln>
+        </p:spPr>
+      </p:sp>
+      <p:sp>
+        <p:nvSpPr>
+          <p:cNvPr id="45" name="label-30"/>
+          <p:cNvSpPr txBox="1"/>
+          <p:nvPr/>
+        </p:nvSpPr>
+        <p:spPr>
+          <a:xfrm>
+            <a:off x="10972800" y="2926080"/>
+            <a:ext cx="914400" cy="502920"/>
+          </a:xfrm>
+          <a:prstGeom prst="rect">
+            <a:avLst/>
+          </a:prstGeom>
+          <a:noFill/>
+          <a:ln/>
+        </p:spPr>
+        <p:txBody>
+          <a:bodyPr wrap="square" lIns="0" tIns="0" rIns="0" bIns="0" rtlCol="0" anchor="ctr"/>
+          <a:lstStyle/>
+          <a:p>
+            <a:pPr algn="l" indent="0" marL="0">
+              <a:buNone/>
+            </a:pPr>
+            <a:r>
+              <a:rPr lang="en-US" sz="950" dirty="0">
+                <a:solidFill>
+                  <a:srgbClr val="5B6470"/>
+                </a:solidFill>
+                <a:latin typeface="Calibri" pitchFamily="34" charset="0"/>
+                <a:ea typeface="Calibri" pitchFamily="34" charset="-122"/>
+                <a:cs typeface="Calibri" pitchFamily="34" charset="-120"/>
+              </a:rPr>
               <a:t>« sans question » :</a:t>
             </a:r>
-            <a:endParaRPr lang="en-US" sz="1050" dirty="0"/>
+            <a:endParaRPr lang="en-US" sz="950" dirty="0"/>
           </a:p>
           <a:p>
             <a:pPr algn="l" indent="0" marL="0">
               <a:buNone/>
             </a:pPr>
             <a:r>
-              <a:rPr lang="en-US" sz="1050" dirty="0">
+              <a:rPr lang="en-US" sz="950" dirty="0">
                 <a:solidFill>
                   <a:srgbClr val="5B6470"/>
                 </a:solidFill>
@@ -26007,7 +26199,7 @@
               </a:rPr>
               <a:t>réponses recommandées</a:t>
             </a:r>
-            <a:endParaRPr lang="en-US" sz="1050" dirty="0"/>
+            <a:endParaRPr lang="en-US" sz="950" dirty="0"/>
           </a:p>
         </p:txBody>
       </p:sp>

--- a/opencode-v2/docs/presentation-flux.pptx
+++ b/opencode-v2/docs/presentation-flux.pptx
@@ -123,7 +123,7 @@
   <p:extLst>
     <p:ext uri="{521415D9-36F7-43E2-AB2F-B90AF26B5E84}">
       <p14:sectionLst xmlns:p14="http://schemas.microsoft.com/office/powerpoint/2010/main">
-        <p14:section name="Le principe" id="{eab4d58c-2835-4128-7aee-6eb84aca7c38}">
+        <p14:section name="Le principe" id="{1aadb8b0-9f10-fd48-9f15-7fba35e72571}">
           <p14:sldIdLst>
             <p14:sldId id="256"/>
             <p14:sldId id="257"/>
@@ -131,14 +131,14 @@
             <p14:sldId id="259"/>
           </p14:sldIdLst>
         </p14:section>
-        <p14:section name="/fortify" id="{ca9d21e0-2862-2979-89e5-323f9df02076}">
+        <p14:section name="/fortify" id="{cb259b1d-7dbd-c372-3caf-65de4e423cbe}">
           <p14:sldIdLst>
             <p14:sldId id="260"/>
             <p14:sldId id="261"/>
             <p14:sldId id="262"/>
           </p14:sldIdLst>
         </p14:section>
-        <p14:section name="/go" id="{f89b272f-e69a-a241-148e-32470c067e24}">
+        <p14:section name="/go" id="{c3ef55cd-2f06-319a-3092-edc268f4a0fc}">
           <p14:sldIdLst>
             <p14:sldId id="263"/>
             <p14:sldId id="264"/>
@@ -146,24 +146,24 @@
             <p14:sldId id="266"/>
           </p14:sldIdLst>
         </p14:section>
-        <p14:section name="Sans ticket" id="{b7c7eeb2-48f7-3051-1dd7-afb137ecfdf7}">
+        <p14:section name="Sans ticket" id="{01fec87f-fc07-4c47-b58b-6ebfd7e91951}">
           <p14:sldIdLst>
             <p14:sldId id="267"/>
           </p14:sldIdLst>
         </p14:section>
-        <p14:section name="Après la MR" id="{4721eef3-3122-8fe0-a2b6-3a7f35039fe7}">
+        <p14:section name="Après la MR" id="{ca91a492-6c2e-4b35-7b8c-f0d140527095}">
           <p14:sldIdLst>
             <p14:sldId id="268"/>
             <p14:sldId id="269"/>
           </p14:sldIdLst>
         </p14:section>
-        <p14:section name="Quand ça coince" id="{dec738a9-2bd2-50ac-d07d-65395426cf33}">
+        <p14:section name="Quand ça coince" id="{dd02336a-f6c8-34c8-1527-30dd36995653}">
           <p14:sldIdLst>
             <p14:sldId id="270"/>
             <p14:sldId id="271"/>
           </p14:sldIdLst>
         </p14:section>
-        <p14:section name="Conclusion" id="{64a36f63-d36e-0acb-41eb-c9fd76f70578}">
+        <p14:section name="Conclusion" id="{6cea2fc8-f3dd-3bf0-14e9-8b2b68897a05}">
           <p14:sldIdLst>
             <p14:sldId id="272"/>
           </p14:sldIdLst>
@@ -1100,7 +1100,7 @@
           <a:p>
             <a:r>
               <a:rPr lang="en-US" dirty="0"/>
-              <a:t>Trois familles. Ce qui repart tout seul : une coupure du VPN pendant un fetch ou un push, un Artifactory ou un registre npm qui redémarre, un git status de Rider qui tient l'index au moment du commit, un appel Jira ou GitLab en erreur serveur, le serveur du modèle qui tombe quelques minutes. Chaque nouvel essai tient dans le temps de la commande, et une ligne le dit dans la sortie. Ce qui est borné : rien n'attend sans limite, et un script qui atteint sa borne dit ce qui a tourné avant de s'arrêter. Ce qui n'est jamais relancé : tout ce qui échouerait pareil. En particulier un test n'est jamais relancé pour passer au vert : instable, il reste un défaut. Après les essais, un message dit quoi régler, hors d'OpenCode.</a:t>
+              <a:t>Trois familles. Ce qui repart tout seul : une coupure du VPN pendant un fetch ou un push, un Artifactory ou un registre npm qui redémarre, un git status de Rider qui tient l'index au moment du commit, un appel Jira ou GitLab en erreur serveur, le serveur du modèle qui tombe quelques minutes. Un « trop de requêtes » (429) n'est pas une panne : le prochain essai vient quand le serveur le demande, sinon après quelques secondes, différentes pour chaque agent qui travaille en même temps, pour qu'ils ne redemandent pas tous au même instant. Chaque nouvel essai tient dans le temps de la commande, et une ligne le dit dans la sortie. Ce qui est borné : rien n'attend sans limite, et un script qui atteint sa borne dit ce qui a tourné avant de s'arrêter. Ce qui n'est jamais relancé : tout ce qui échouerait pareil. En particulier un test n'est jamais relancé pour passer au vert : instable, il reste un défaut. Après les essais, un message dit quoi régler, hors d'OpenCode.</a:t>
             </a:r>
             <a:endParaRPr lang="en-US" dirty="0"/>
           </a:p>
@@ -11231,11 +11231,11 @@
         <p:spPr>
           <a:xfrm>
             <a:off x="621792" y="2267712"/>
-            <a:ext cx="3191256" cy="457200"/>
+            <a:ext cx="3191256" cy="393192"/>
           </a:xfrm>
           <a:prstGeom prst="roundRect">
             <a:avLst>
-              <a:gd name="adj" fmla="val 12000"/>
+              <a:gd name="adj" fmla="val 13953"/>
             </a:avLst>
           </a:prstGeom>
           <a:solidFill>
@@ -11277,12 +11277,12 @@
         </p:nvSpPr>
         <p:spPr>
           <a:xfrm>
-            <a:off x="621792" y="2834640"/>
-            <a:ext cx="3191256" cy="457200"/>
+            <a:off x="621792" y="2770632"/>
+            <a:ext cx="3191256" cy="393192"/>
           </a:xfrm>
           <a:prstGeom prst="roundRect">
             <a:avLst>
-              <a:gd name="adj" fmla="val 12000"/>
+              <a:gd name="adj" fmla="val 13953"/>
             </a:avLst>
           </a:prstGeom>
           <a:solidFill>
@@ -11324,12 +11324,12 @@
         </p:nvSpPr>
         <p:spPr>
           <a:xfrm>
-            <a:off x="621792" y="3401568"/>
-            <a:ext cx="3191256" cy="457200"/>
+            <a:off x="621792" y="3273552"/>
+            <a:ext cx="3191256" cy="393192"/>
           </a:xfrm>
           <a:prstGeom prst="roundRect">
             <a:avLst>
-              <a:gd name="adj" fmla="val 12000"/>
+              <a:gd name="adj" fmla="val 13953"/>
             </a:avLst>
           </a:prstGeom>
           <a:solidFill>
@@ -11371,12 +11371,12 @@
         </p:nvSpPr>
         <p:spPr>
           <a:xfrm>
-            <a:off x="621792" y="3968496"/>
-            <a:ext cx="3191256" cy="457200"/>
+            <a:off x="621792" y="3776472"/>
+            <a:ext cx="3191256" cy="393192"/>
           </a:xfrm>
           <a:prstGeom prst="roundRect">
             <a:avLst>
-              <a:gd name="adj" fmla="val 12000"/>
+              <a:gd name="adj" fmla="val 13953"/>
             </a:avLst>
           </a:prstGeom>
           <a:solidFill>
@@ -11418,12 +11418,12 @@
         </p:nvSpPr>
         <p:spPr>
           <a:xfrm>
-            <a:off x="621792" y="4535424"/>
-            <a:ext cx="3191256" cy="457200"/>
+            <a:off x="621792" y="4279392"/>
+            <a:ext cx="3191256" cy="393192"/>
           </a:xfrm>
           <a:prstGeom prst="roundRect">
             <a:avLst>
-              <a:gd name="adj" fmla="val 12000"/>
+              <a:gd name="adj" fmla="val 13953"/>
             </a:avLst>
           </a:prstGeom>
           <a:solidFill>
@@ -11465,12 +11465,12 @@
         </p:nvSpPr>
         <p:spPr>
           <a:xfrm>
-            <a:off x="621792" y="5102352"/>
-            <a:ext cx="3191256" cy="457200"/>
+            <a:off x="621792" y="4782312"/>
+            <a:ext cx="3191256" cy="393192"/>
           </a:xfrm>
           <a:prstGeom prst="roundRect">
             <a:avLst>
-              <a:gd name="adj" fmla="val 12000"/>
+              <a:gd name="adj" fmla="val 13953"/>
             </a:avLst>
           </a:prstGeom>
           <a:solidFill>
@@ -11506,7 +11506,54 @@
       </p:sp>
       <p:sp>
         <p:nvSpPr>
-          <p:cNvPr id="13" name="card-≤  Borné dans le temps"/>
+          <p:cNvPr id="13" name="item-↻  Relancé tout seul-6"/>
+          <p:cNvSpPr/>
+          <p:nvPr/>
+        </p:nvSpPr>
+        <p:spPr>
+          <a:xfrm>
+            <a:off x="621792" y="5285232"/>
+            <a:ext cx="3191256" cy="393192"/>
+          </a:xfrm>
+          <a:prstGeom prst="roundRect">
+            <a:avLst>
+              <a:gd name="adj" fmla="val 13953"/>
+            </a:avLst>
+          </a:prstGeom>
+          <a:solidFill>
+            <a:srgbClr val="FFFFFF"/>
+          </a:solidFill>
+          <a:ln w="9525">
+            <a:solidFill>
+              <a:srgbClr val="B7791F"/>
+            </a:solidFill>
+          </a:ln>
+        </p:spPr>
+        <p:txBody>
+          <a:bodyPr wrap="square" lIns="114300" tIns="0" rIns="101600" bIns="0" rtlCol="0" anchor="ctr"/>
+          <a:lstStyle/>
+          <a:p>
+            <a:pPr algn="l" indent="0" marL="0">
+              <a:buNone/>
+            </a:pPr>
+            <a:r>
+              <a:rPr lang="en-US" sz="1400" dirty="0">
+                <a:solidFill>
+                  <a:srgbClr val="1F2933"/>
+                </a:solidFill>
+                <a:latin typeface="Calibri" pitchFamily="34" charset="0"/>
+                <a:ea typeface="Calibri" pitchFamily="34" charset="-122"/>
+                <a:cs typeface="Calibri" pitchFamily="34" charset="-120"/>
+              </a:rPr>
+              <a:t>Trop de requêtes : selon le serveur</a:t>
+            </a:r>
+            <a:endParaRPr lang="en-US" sz="1400" dirty="0"/>
+          </a:p>
+        </p:txBody>
+      </p:sp>
+      <p:sp>
+        <p:nvSpPr>
+          <p:cNvPr id="14" name="card-≤  Borné dans le temps"/>
           <p:cNvSpPr/>
           <p:nvPr/>
         </p:nvSpPr>
@@ -11533,7 +11580,7 @@
       </p:sp>
       <p:sp>
         <p:nvSpPr>
-          <p:cNvPr id="14" name="card-head-≤  Borné dans le temps"/>
+          <p:cNvPr id="15" name="card-head-≤  Borné dans le temps"/>
           <p:cNvSpPr txBox="1"/>
           <p:nvPr/>
         </p:nvSpPr>
@@ -11572,18 +11619,18 @@
       </p:sp>
       <p:sp>
         <p:nvSpPr>
-          <p:cNvPr id="15" name="item-≤  Borné dans le temps-0"/>
+          <p:cNvPr id="16" name="item-≤  Borné dans le temps-0"/>
           <p:cNvSpPr/>
           <p:nvPr/>
         </p:nvSpPr>
         <p:spPr>
           <a:xfrm>
             <a:off x="4498848" y="2267712"/>
-            <a:ext cx="3191256" cy="457200"/>
+            <a:ext cx="3191256" cy="393192"/>
           </a:xfrm>
           <a:prstGeom prst="roundRect">
             <a:avLst>
-              <a:gd name="adj" fmla="val 12000"/>
+              <a:gd name="adj" fmla="val 13953"/>
             </a:avLst>
           </a:prstGeom>
           <a:solidFill>
@@ -11619,18 +11666,18 @@
       </p:sp>
       <p:sp>
         <p:nvSpPr>
-          <p:cNvPr id="16" name="item-≤  Borné dans le temps-1"/>
-          <p:cNvSpPr/>
-          <p:nvPr/>
-        </p:nvSpPr>
-        <p:spPr>
-          <a:xfrm>
-            <a:off x="4498848" y="2834640"/>
-            <a:ext cx="3191256" cy="457200"/>
+          <p:cNvPr id="17" name="item-≤  Borné dans le temps-1"/>
+          <p:cNvSpPr/>
+          <p:nvPr/>
+        </p:nvSpPr>
+        <p:spPr>
+          <a:xfrm>
+            <a:off x="4498848" y="2770632"/>
+            <a:ext cx="3191256" cy="393192"/>
           </a:xfrm>
           <a:prstGeom prst="roundRect">
             <a:avLst>
-              <a:gd name="adj" fmla="val 12000"/>
+              <a:gd name="adj" fmla="val 13953"/>
             </a:avLst>
           </a:prstGeom>
           <a:solidFill>
@@ -11666,18 +11713,18 @@
       </p:sp>
       <p:sp>
         <p:nvSpPr>
-          <p:cNvPr id="17" name="item-≤  Borné dans le temps-2"/>
-          <p:cNvSpPr/>
-          <p:nvPr/>
-        </p:nvSpPr>
-        <p:spPr>
-          <a:xfrm>
-            <a:off x="4498848" y="3401568"/>
-            <a:ext cx="3191256" cy="457200"/>
+          <p:cNvPr id="18" name="item-≤  Borné dans le temps-2"/>
+          <p:cNvSpPr/>
+          <p:nvPr/>
+        </p:nvSpPr>
+        <p:spPr>
+          <a:xfrm>
+            <a:off x="4498848" y="3273552"/>
+            <a:ext cx="3191256" cy="393192"/>
           </a:xfrm>
           <a:prstGeom prst="roundRect">
             <a:avLst>
-              <a:gd name="adj" fmla="val 12000"/>
+              <a:gd name="adj" fmla="val 13953"/>
             </a:avLst>
           </a:prstGeom>
           <a:solidFill>
@@ -11713,18 +11760,18 @@
       </p:sp>
       <p:sp>
         <p:nvSpPr>
-          <p:cNvPr id="18" name="item-≤  Borné dans le temps-3"/>
-          <p:cNvSpPr/>
-          <p:nvPr/>
-        </p:nvSpPr>
-        <p:spPr>
-          <a:xfrm>
-            <a:off x="4498848" y="3968496"/>
-            <a:ext cx="3191256" cy="457200"/>
+          <p:cNvPr id="19" name="item-≤  Borné dans le temps-3"/>
+          <p:cNvSpPr/>
+          <p:nvPr/>
+        </p:nvSpPr>
+        <p:spPr>
+          <a:xfrm>
+            <a:off x="4498848" y="3776472"/>
+            <a:ext cx="3191256" cy="393192"/>
           </a:xfrm>
           <a:prstGeom prst="roundRect">
             <a:avLst>
-              <a:gd name="adj" fmla="val 12000"/>
+              <a:gd name="adj" fmla="val 13953"/>
             </a:avLst>
           </a:prstGeom>
           <a:solidFill>
@@ -11760,18 +11807,18 @@
       </p:sp>
       <p:sp>
         <p:nvSpPr>
-          <p:cNvPr id="19" name="item-≤  Borné dans le temps-4"/>
-          <p:cNvSpPr/>
-          <p:nvPr/>
-        </p:nvSpPr>
-        <p:spPr>
-          <a:xfrm>
-            <a:off x="4498848" y="4535424"/>
-            <a:ext cx="3191256" cy="457200"/>
+          <p:cNvPr id="20" name="item-≤  Borné dans le temps-4"/>
+          <p:cNvSpPr/>
+          <p:nvPr/>
+        </p:nvSpPr>
+        <p:spPr>
+          <a:xfrm>
+            <a:off x="4498848" y="4279392"/>
+            <a:ext cx="3191256" cy="393192"/>
           </a:xfrm>
           <a:prstGeom prst="roundRect">
             <a:avLst>
-              <a:gd name="adj" fmla="val 12000"/>
+              <a:gd name="adj" fmla="val 13953"/>
             </a:avLst>
           </a:prstGeom>
           <a:solidFill>
@@ -11807,18 +11854,18 @@
       </p:sp>
       <p:sp>
         <p:nvSpPr>
-          <p:cNvPr id="20" name="item-≤  Borné dans le temps-5"/>
-          <p:cNvSpPr/>
-          <p:nvPr/>
-        </p:nvSpPr>
-        <p:spPr>
-          <a:xfrm>
-            <a:off x="4498848" y="5102352"/>
-            <a:ext cx="3191256" cy="457200"/>
+          <p:cNvPr id="21" name="item-≤  Borné dans le temps-5"/>
+          <p:cNvSpPr/>
+          <p:nvPr/>
+        </p:nvSpPr>
+        <p:spPr>
+          <a:xfrm>
+            <a:off x="4498848" y="4782312"/>
+            <a:ext cx="3191256" cy="393192"/>
           </a:xfrm>
           <a:prstGeom prst="roundRect">
             <a:avLst>
-              <a:gd name="adj" fmla="val 12000"/>
+              <a:gd name="adj" fmla="val 13953"/>
             </a:avLst>
           </a:prstGeom>
           <a:solidFill>
@@ -11854,7 +11901,7 @@
       </p:sp>
       <p:sp>
         <p:nvSpPr>
-          <p:cNvPr id="21" name="card-⛔  Jamais relancé"/>
+          <p:cNvPr id="22" name="card-⛔  Jamais relancé"/>
           <p:cNvSpPr/>
           <p:nvPr/>
         </p:nvSpPr>
@@ -11881,7 +11928,7 @@
       </p:sp>
       <p:sp>
         <p:nvSpPr>
-          <p:cNvPr id="22" name="card-head-⛔  Jamais relancé"/>
+          <p:cNvPr id="23" name="card-head-⛔  Jamais relancé"/>
           <p:cNvSpPr txBox="1"/>
           <p:nvPr/>
         </p:nvSpPr>
@@ -11920,18 +11967,18 @@
       </p:sp>
       <p:sp>
         <p:nvSpPr>
-          <p:cNvPr id="23" name="item-⛔  Jamais relancé-0"/>
+          <p:cNvPr id="24" name="item-⛔  Jamais relancé-0"/>
           <p:cNvSpPr/>
           <p:nvPr/>
         </p:nvSpPr>
         <p:spPr>
           <a:xfrm>
             <a:off x="8375904" y="2267712"/>
-            <a:ext cx="3191256" cy="457200"/>
+            <a:ext cx="3191256" cy="393192"/>
           </a:xfrm>
           <a:prstGeom prst="roundRect">
             <a:avLst>
-              <a:gd name="adj" fmla="val 12000"/>
+              <a:gd name="adj" fmla="val 13953"/>
             </a:avLst>
           </a:prstGeom>
           <a:solidFill>
@@ -11967,18 +12014,18 @@
       </p:sp>
       <p:sp>
         <p:nvSpPr>
-          <p:cNvPr id="24" name="item-⛔  Jamais relancé-1"/>
-          <p:cNvSpPr/>
-          <p:nvPr/>
-        </p:nvSpPr>
-        <p:spPr>
-          <a:xfrm>
-            <a:off x="8375904" y="2834640"/>
-            <a:ext cx="3191256" cy="457200"/>
+          <p:cNvPr id="25" name="item-⛔  Jamais relancé-1"/>
+          <p:cNvSpPr/>
+          <p:nvPr/>
+        </p:nvSpPr>
+        <p:spPr>
+          <a:xfrm>
+            <a:off x="8375904" y="2770632"/>
+            <a:ext cx="3191256" cy="393192"/>
           </a:xfrm>
           <a:prstGeom prst="roundRect">
             <a:avLst>
-              <a:gd name="adj" fmla="val 12000"/>
+              <a:gd name="adj" fmla="val 13953"/>
             </a:avLst>
           </a:prstGeom>
           <a:solidFill>
@@ -12014,18 +12061,18 @@
       </p:sp>
       <p:sp>
         <p:nvSpPr>
-          <p:cNvPr id="25" name="item-⛔  Jamais relancé-2"/>
-          <p:cNvSpPr/>
-          <p:nvPr/>
-        </p:nvSpPr>
-        <p:spPr>
-          <a:xfrm>
-            <a:off x="8375904" y="3401568"/>
-            <a:ext cx="3191256" cy="457200"/>
+          <p:cNvPr id="26" name="item-⛔  Jamais relancé-2"/>
+          <p:cNvSpPr/>
+          <p:nvPr/>
+        </p:nvSpPr>
+        <p:spPr>
+          <a:xfrm>
+            <a:off x="8375904" y="3273552"/>
+            <a:ext cx="3191256" cy="393192"/>
           </a:xfrm>
           <a:prstGeom prst="roundRect">
             <a:avLst>
-              <a:gd name="adj" fmla="val 12000"/>
+              <a:gd name="adj" fmla="val 13953"/>
             </a:avLst>
           </a:prstGeom>
           <a:solidFill>
@@ -12061,18 +12108,18 @@
       </p:sp>
       <p:sp>
         <p:nvSpPr>
-          <p:cNvPr id="26" name="item-⛔  Jamais relancé-3"/>
-          <p:cNvSpPr/>
-          <p:nvPr/>
-        </p:nvSpPr>
-        <p:spPr>
-          <a:xfrm>
-            <a:off x="8375904" y="3968496"/>
-            <a:ext cx="3191256" cy="457200"/>
+          <p:cNvPr id="27" name="item-⛔  Jamais relancé-3"/>
+          <p:cNvSpPr/>
+          <p:nvPr/>
+        </p:nvSpPr>
+        <p:spPr>
+          <a:xfrm>
+            <a:off x="8375904" y="3776472"/>
+            <a:ext cx="3191256" cy="393192"/>
           </a:xfrm>
           <a:prstGeom prst="roundRect">
             <a:avLst>
-              <a:gd name="adj" fmla="val 12000"/>
+              <a:gd name="adj" fmla="val 13953"/>
             </a:avLst>
           </a:prstGeom>
           <a:solidFill>
@@ -12108,18 +12155,18 @@
       </p:sp>
       <p:sp>
         <p:nvSpPr>
-          <p:cNvPr id="27" name="item-⛔  Jamais relancé-4"/>
-          <p:cNvSpPr/>
-          <p:nvPr/>
-        </p:nvSpPr>
-        <p:spPr>
-          <a:xfrm>
-            <a:off x="8375904" y="4535424"/>
-            <a:ext cx="3191256" cy="457200"/>
+          <p:cNvPr id="28" name="item-⛔  Jamais relancé-4"/>
+          <p:cNvSpPr/>
+          <p:nvPr/>
+        </p:nvSpPr>
+        <p:spPr>
+          <a:xfrm>
+            <a:off x="8375904" y="4279392"/>
+            <a:ext cx="3191256" cy="393192"/>
           </a:xfrm>
           <a:prstGeom prst="roundRect">
             <a:avLst>
-              <a:gd name="adj" fmla="val 12000"/>
+              <a:gd name="adj" fmla="val 13953"/>
             </a:avLst>
           </a:prstGeom>
           <a:solidFill>
@@ -12155,18 +12202,18 @@
       </p:sp>
       <p:sp>
         <p:nvSpPr>
-          <p:cNvPr id="28" name="item-⛔  Jamais relancé-5"/>
-          <p:cNvSpPr/>
-          <p:nvPr/>
-        </p:nvSpPr>
-        <p:spPr>
-          <a:xfrm>
-            <a:off x="8375904" y="5102352"/>
-            <a:ext cx="3191256" cy="457200"/>
+          <p:cNvPr id="29" name="item-⛔  Jamais relancé-5"/>
+          <p:cNvSpPr/>
+          <p:nvPr/>
+        </p:nvSpPr>
+        <p:spPr>
+          <a:xfrm>
+            <a:off x="8375904" y="4782312"/>
+            <a:ext cx="3191256" cy="393192"/>
           </a:xfrm>
           <a:prstGeom prst="roundRect">
             <a:avLst>
-              <a:gd name="adj" fmla="val 12000"/>
+              <a:gd name="adj" fmla="val 13953"/>
             </a:avLst>
           </a:prstGeom>
           <a:solidFill>
@@ -12202,7 +12249,7 @@
       </p:sp>
       <p:sp>
         <p:nvSpPr>
-          <p:cNvPr id="29" name="after"/>
+          <p:cNvPr id="30" name="after"/>
           <p:cNvSpPr txBox="1"/>
           <p:nvPr/>
         </p:nvSpPr>
